--- a/courses/ooad/sessions/s02.pptx
+++ b/courses/ooad/sessions/s02.pptx
@@ -2288,7 +2288,7 @@
             </a:pPr>
             <a:r>
               <a:rPr lang="ko-KR" sz="1200"/>
-              <a:t>요구공학의 수집··분석·명세.검증·타당성 확인·소통·문서화·관리 활동을 연결한다.</a:t>
+              <a:t>요구공학의 수집·분석·명세·검증·관리 활동을 연결한다.</a:t>
             </a:r>
           </a:p>
           <a:p>
@@ -2297,7 +2297,7 @@
             </a:pPr>
             <a:r>
               <a:rPr lang="ko-KR" sz="1200"/>
-              <a:t>이 여섯 묶음은 수업의 설명 구조이며 표준의 절·분류를 그대로 옮긴 것이 아니다. 요구공학 표준의 범위는 [ISO/IEC/IEEE 29148:2018 공식 설명](https://www.iso.org/standard/72089.html), 반복적 요구 탐색은 Craig Larman의 [Evolutionary Requirements](https://www.craiglarman.com/wiki/downloads/applying_uml/larman-ch5-applying-evolutionary-requirements.pdf)를 근거로 한다.</a:t>
+              <a:t>이 다섯 활동은 수업의 설명 구조이며 표준의 절·분류를 그대로 옮긴 것이 아니다. 요구공학 표준의 범위는 [ISO/IEC/IEEE 29148:2018 공식 설명](https://www.iso.org/standard/72089.html), 반복적 요구 탐색은 Craig Larman의 [Evolutionary Requirements](https://www.craiglarman.com/wiki/downloads/applying_uml/larman-ch5-applying-evolutionary-requirements.pdf)를 근거로 한다.</a:t>
             </a:r>
           </a:p>
         </p:txBody>
